--- a/docs/instructions/English/EU_SAE_Workbench_Guide_1_Install_and_Start.pptx
+++ b/docs/instructions/English/EU_SAE_Workbench_Guide_1_Install_and_Start.pptx
@@ -4932,7 +4932,7 @@
                   <a:srgbClr val="33415C"/>
                 </a:solidFill>
               </a:rPr>
-              <a:t>Under Assets, for example EU_SAE_520_w5p.zip. Not the 'Source code' archives.</a:t>
+              <a:t>Under Assets, for example EU_SAE_520_w5q.zip. Not the 'Source code' archives.</a:t>
             </a:r>
             <a:endParaRPr lang="en-US" sz="1300" dirty="0"/>
           </a:p>
@@ -5232,7 +5232,7 @@
                 <a:ea typeface="Courier New" pitchFamily="34" charset="-122"/>
                 <a:cs typeface="Courier New" pitchFamily="34" charset="-120"/>
               </a:rPr>
-              <a:t>EU_SAE_520_w5p/</a:t>
+              <a:t>EU_SAE_520_w5q/</a:t>
             </a:r>
             <a:endParaRPr lang="en-US" sz="1050" dirty="0"/>
           </a:p>

--- a/docs/instructions/English/EU_SAE_Workbench_Guide_1_Install_and_Start.pptx
+++ b/docs/instructions/English/EU_SAE_Workbench_Guide_1_Install_and_Start.pptx
@@ -4932,7 +4932,7 @@
                   <a:srgbClr val="33415C"/>
                 </a:solidFill>
               </a:rPr>
-              <a:t>Under Assets, for example EU_SAE_520_w5q.zip. Not the 'Source code' archives.</a:t>
+              <a:t>Under Assets, for example EU_SAE_520_w5r.zip. Not the 'Source code' archives.</a:t>
             </a:r>
             <a:endParaRPr lang="en-US" sz="1300" dirty="0"/>
           </a:p>
@@ -5232,7 +5232,7 @@
                 <a:ea typeface="Courier New" pitchFamily="34" charset="-122"/>
                 <a:cs typeface="Courier New" pitchFamily="34" charset="-120"/>
               </a:rPr>
-              <a:t>EU_SAE_520_w5q/</a:t>
+              <a:t>EU_SAE_520_w5r/</a:t>
             </a:r>
             <a:endParaRPr lang="en-US" sz="1050" dirty="0"/>
           </a:p>

--- a/docs/instructions/English/EU_SAE_Workbench_Guide_1_Install_and_Start.pptx
+++ b/docs/instructions/English/EU_SAE_Workbench_Guide_1_Install_and_Start.pptx
@@ -4932,7 +4932,7 @@
                   <a:srgbClr val="33415C"/>
                 </a:solidFill>
               </a:rPr>
-              <a:t>Under Assets, for example EU_SAE_520_w5r.zip. Not the 'Source code' archives.</a:t>
+              <a:t>Under Assets, for example EU_SAE_520_w5s.zip. Not the 'Source code' archives.</a:t>
             </a:r>
             <a:endParaRPr lang="en-US" sz="1300" dirty="0"/>
           </a:p>
@@ -5232,7 +5232,7 @@
                 <a:ea typeface="Courier New" pitchFamily="34" charset="-122"/>
                 <a:cs typeface="Courier New" pitchFamily="34" charset="-120"/>
               </a:rPr>
-              <a:t>EU_SAE_520_w5r/</a:t>
+              <a:t>EU_SAE_520_w5s/</a:t>
             </a:r>
             <a:endParaRPr lang="en-US" sz="1050" dirty="0"/>
           </a:p>
